--- a/docs/OfficeBridge_발표자료.pptx
+++ b/docs/OfficeBridge_발표자료.pptx
@@ -4090,53 +4090,14 @@
       </p:sp>
       <p:sp>
         <p:nvSpPr>
-          <p:cNvPr id="3" name="Text 1"/>
-          <p:cNvSpPr txBox="1"/>
-          <p:nvPr/>
-        </p:nvSpPr>
-        <p:spPr>
-          <a:xfrm>
-            <a:off x="640080" y="1170432"/>
-            <a:ext cx="10881360" cy="457200"/>
-          </a:xfrm>
-          <a:prstGeom prst="rect">
-            <a:avLst/>
-          </a:prstGeom>
-          <a:noFill/>
-          <a:ln/>
-        </p:spPr>
-        <p:txBody>
-          <a:bodyPr wrap="square" lIns="0" tIns="0" rIns="0" bIns="0" rtlCol="0" anchor="ctr"/>
-          <a:lstStyle/>
-          <a:p>
-            <a:pPr indent="0" marL="0">
-              <a:buNone/>
-            </a:pPr>
-            <a:r>
-              <a:rPr lang="en-US" sz="1500" dirty="0">
-                <a:solidFill>
-                  <a:srgbClr val="EAF1FB"/>
-                </a:solidFill>
-                <a:latin typeface="Calibri" pitchFamily="34" charset="0"/>
-                <a:ea typeface="Calibri" pitchFamily="34" charset="-122"/>
-                <a:cs typeface="Calibri" pitchFamily="34" charset="-120"/>
-              </a:rPr>
-              <a:t>데모 계정 없이, 실서비스 초기 상태로 운영 중</a:t>
-            </a:r>
-            <a:endParaRPr lang="en-US" sz="1500" dirty="0"/>
-          </a:p>
-        </p:txBody>
-      </p:sp>
-      <p:sp>
-        <p:nvSpPr>
-          <p:cNvPr id="4" name="Shape 2"/>
+          <p:cNvPr id="3" name="Shape 1"/>
           <p:cNvSpPr/>
           <p:nvPr/>
         </p:nvSpPr>
         <p:spPr>
           <a:xfrm>
-            <a:off x="640080" y="1965960"/>
-            <a:ext cx="2514600" cy="1600200"/>
+            <a:off x="1097280" y="1691640"/>
+            <a:ext cx="3383280" cy="1600200"/>
           </a:xfrm>
           <a:prstGeom prst="roundRect">
             <a:avLst>
@@ -4151,14 +4112,53 @@
       </p:sp>
       <p:sp>
         <p:nvSpPr>
+          <p:cNvPr id="4" name="Text 2"/>
+          <p:cNvSpPr txBox="1"/>
+          <p:nvPr/>
+        </p:nvSpPr>
+        <p:spPr>
+          <a:xfrm>
+            <a:off x="1097280" y="1856232"/>
+            <a:ext cx="3383280" cy="685800"/>
+          </a:xfrm>
+          <a:prstGeom prst="rect">
+            <a:avLst/>
+          </a:prstGeom>
+          <a:noFill/>
+          <a:ln/>
+        </p:spPr>
+        <p:txBody>
+          <a:bodyPr wrap="square" lIns="0" tIns="0" rIns="0" bIns="0" rtlCol="0" anchor="ctr"/>
+          <a:lstStyle/>
+          <a:p>
+            <a:pPr algn="ctr" indent="0" marL="0">
+              <a:buNone/>
+            </a:pPr>
+            <a:r>
+              <a:rPr lang="en-US" sz="3400" b="1" dirty="0">
+                <a:solidFill>
+                  <a:srgbClr val="00C39A"/>
+                </a:solidFill>
+                <a:latin typeface="Calibri" pitchFamily="34" charset="0"/>
+                <a:ea typeface="Calibri" pitchFamily="34" charset="-122"/>
+                <a:cs typeface="Calibri" pitchFamily="34" charset="-120"/>
+              </a:rPr>
+              <a:t>3</a:t>
+            </a:r>
+            <a:endParaRPr lang="en-US" sz="3400" dirty="0"/>
+          </a:p>
+        </p:txBody>
+      </p:sp>
+      <p:sp>
+        <p:nvSpPr>
           <p:cNvPr id="5" name="Text 3"/>
           <p:cNvSpPr txBox="1"/>
           <p:nvPr/>
         </p:nvSpPr>
         <p:spPr>
           <a:xfrm>
-            <a:off x="640080" y="2130552"/>
-            <a:ext cx="2514600" cy="685800"/>
+            <a:off x="1097280" y="2587752"/>
+            <a:ext cx="3383280" cy="594360"/>
           </a:xfrm>
           <a:prstGeom prst="rect">
             <a:avLst/>
@@ -4174,40 +4174,18 @@
               <a:buNone/>
             </a:pPr>
             <a:r>
-              <a:rPr lang="en-US" sz="3400" b="1" dirty="0">
-                <a:solidFill>
-                  <a:srgbClr val="00C39A"/>
-                </a:solidFill>
-                <a:latin typeface="Calibri" pitchFamily="34" charset="0"/>
-                <a:ea typeface="Calibri" pitchFamily="34" charset="-122"/>
-                <a:cs typeface="Calibri" pitchFamily="34" charset="-120"/>
-              </a:rPr>
-              <a:t>42</a:t>
-            </a:r>
-            <a:endParaRPr lang="en-US" sz="3400" dirty="0"/>
-          </a:p>
-        </p:txBody>
-      </p:sp>
-      <p:sp>
-        <p:nvSpPr>
-          <p:cNvPr id="6" name="Text 4"/>
-          <p:cNvSpPr txBox="1"/>
-          <p:nvPr/>
-        </p:nvSpPr>
-        <p:spPr>
-          <a:xfrm>
-            <a:off x="640080" y="2862072"/>
-            <a:ext cx="2514600" cy="594360"/>
-          </a:xfrm>
-          <a:prstGeom prst="rect">
-            <a:avLst/>
-          </a:prstGeom>
-          <a:noFill/>
-          <a:ln/>
-        </p:spPr>
-        <p:txBody>
-          <a:bodyPr wrap="square" lIns="0" tIns="0" rIns="0" bIns="0" rtlCol="0" anchor="ctr"/>
-          <a:lstStyle/>
+              <a:rPr lang="en-US" sz="1100" dirty="0">
+                <a:solidFill>
+                  <a:srgbClr val="EAF1FB"/>
+                </a:solidFill>
+                <a:latin typeface="Calibri" pitchFamily="34" charset="0"/>
+                <a:ea typeface="Calibri" pitchFamily="34" charset="-122"/>
+                <a:cs typeface="Calibri" pitchFamily="34" charset="-120"/>
+              </a:rPr>
+              <a:t>구성요소</a:t>
+            </a:r>
+            <a:endParaRPr lang="en-US" sz="1100" dirty="0"/>
+          </a:p>
           <a:p>
             <a:pPr algn="ctr" indent="0" marL="0">
               <a:buNone/>
@@ -4221,7 +4199,7 @@
                 <a:ea typeface="Calibri" pitchFamily="34" charset="-122"/>
                 <a:cs typeface="Calibri" pitchFamily="34" charset="-120"/>
               </a:rPr>
-              <a:t>커밋</a:t>
+              <a:t>(릴레이·커넥터·브릿지)</a:t>
             </a:r>
             <a:endParaRPr lang="en-US" sz="1100" dirty="0"/>
           </a:p>
@@ -4229,14 +4207,14 @@
       </p:sp>
       <p:sp>
         <p:nvSpPr>
-          <p:cNvPr id="7" name="Shape 5"/>
+          <p:cNvPr id="6" name="Shape 4"/>
           <p:cNvSpPr/>
           <p:nvPr/>
         </p:nvSpPr>
         <p:spPr>
           <a:xfrm>
-            <a:off x="3410712" y="1965960"/>
-            <a:ext cx="2514600" cy="1600200"/>
+            <a:off x="4800600" y="1691640"/>
+            <a:ext cx="3383280" cy="1600200"/>
           </a:xfrm>
           <a:prstGeom prst="roundRect">
             <a:avLst>
@@ -4251,14 +4229,53 @@
       </p:sp>
       <p:sp>
         <p:nvSpPr>
+          <p:cNvPr id="7" name="Text 5"/>
+          <p:cNvSpPr txBox="1"/>
+          <p:nvPr/>
+        </p:nvSpPr>
+        <p:spPr>
+          <a:xfrm>
+            <a:off x="4800600" y="1856232"/>
+            <a:ext cx="3383280" cy="685800"/>
+          </a:xfrm>
+          <a:prstGeom prst="rect">
+            <a:avLst/>
+          </a:prstGeom>
+          <a:noFill/>
+          <a:ln/>
+        </p:spPr>
+        <p:txBody>
+          <a:bodyPr wrap="square" lIns="0" tIns="0" rIns="0" bIns="0" rtlCol="0" anchor="ctr"/>
+          <a:lstStyle/>
+          <a:p>
+            <a:pPr algn="ctr" indent="0" marL="0">
+              <a:buNone/>
+            </a:pPr>
+            <a:r>
+              <a:rPr lang="en-US" sz="3400" b="1" dirty="0">
+                <a:solidFill>
+                  <a:srgbClr val="00C39A"/>
+                </a:solidFill>
+                <a:latin typeface="Calibri" pitchFamily="34" charset="0"/>
+                <a:ea typeface="Calibri" pitchFamily="34" charset="-122"/>
+                <a:cs typeface="Calibri" pitchFamily="34" charset="-120"/>
+              </a:rPr>
+              <a:t>2</a:t>
+            </a:r>
+            <a:endParaRPr lang="en-US" sz="3400" dirty="0"/>
+          </a:p>
+        </p:txBody>
+      </p:sp>
+      <p:sp>
+        <p:nvSpPr>
           <p:cNvPr id="8" name="Text 6"/>
           <p:cNvSpPr txBox="1"/>
           <p:nvPr/>
         </p:nvSpPr>
         <p:spPr>
           <a:xfrm>
-            <a:off x="3410712" y="2130552"/>
-            <a:ext cx="2514600" cy="685800"/>
+            <a:off x="4800600" y="2587752"/>
+            <a:ext cx="3383280" cy="594360"/>
           </a:xfrm>
           <a:prstGeom prst="rect">
             <a:avLst/>
@@ -4274,40 +4291,18 @@
               <a:buNone/>
             </a:pPr>
             <a:r>
-              <a:rPr lang="en-US" sz="3400" b="1" dirty="0">
-                <a:solidFill>
-                  <a:srgbClr val="00C39A"/>
-                </a:solidFill>
-                <a:latin typeface="Calibri" pitchFamily="34" charset="0"/>
-                <a:ea typeface="Calibri" pitchFamily="34" charset="-122"/>
-                <a:cs typeface="Calibri" pitchFamily="34" charset="-120"/>
-              </a:rPr>
-              <a:t>3</a:t>
-            </a:r>
-            <a:endParaRPr lang="en-US" sz="3400" dirty="0"/>
-          </a:p>
-        </p:txBody>
-      </p:sp>
-      <p:sp>
-        <p:nvSpPr>
-          <p:cNvPr id="9" name="Text 7"/>
-          <p:cNvSpPr txBox="1"/>
-          <p:nvPr/>
-        </p:nvSpPr>
-        <p:spPr>
-          <a:xfrm>
-            <a:off x="3410712" y="2862072"/>
-            <a:ext cx="2514600" cy="594360"/>
-          </a:xfrm>
-          <a:prstGeom prst="rect">
-            <a:avLst/>
-          </a:prstGeom>
-          <a:noFill/>
-          <a:ln/>
-        </p:spPr>
-        <p:txBody>
-          <a:bodyPr wrap="square" lIns="0" tIns="0" rIns="0" bIns="0" rtlCol="0" anchor="ctr"/>
-          <a:lstStyle/>
+              <a:rPr lang="en-US" sz="1100" dirty="0">
+                <a:solidFill>
+                  <a:srgbClr val="EAF1FB"/>
+                </a:solidFill>
+                <a:latin typeface="Calibri" pitchFamily="34" charset="0"/>
+                <a:ea typeface="Calibri" pitchFamily="34" charset="-122"/>
+                <a:cs typeface="Calibri" pitchFamily="34" charset="-120"/>
+              </a:rPr>
+              <a:t>지원 플랫폼</a:t>
+            </a:r>
+            <a:endParaRPr lang="en-US" sz="1100" dirty="0"/>
+          </a:p>
           <a:p>
             <a:pPr algn="ctr" indent="0" marL="0">
               <a:buNone/>
@@ -4321,39 +4316,22 @@
                 <a:ea typeface="Calibri" pitchFamily="34" charset="-122"/>
                 <a:cs typeface="Calibri" pitchFamily="34" charset="-120"/>
               </a:rPr>
-              <a:t>구성요소</a:t>
+              <a:t>(Windows·macOS)</a:t>
             </a:r>
             <a:endParaRPr lang="en-US" sz="1100" dirty="0"/>
           </a:p>
-          <a:p>
-            <a:pPr algn="ctr" indent="0" marL="0">
-              <a:buNone/>
-            </a:pPr>
-            <a:r>
-              <a:rPr lang="en-US" sz="1100" dirty="0">
-                <a:solidFill>
-                  <a:srgbClr val="EAF1FB"/>
-                </a:solidFill>
-                <a:latin typeface="Calibri" pitchFamily="34" charset="0"/>
-                <a:ea typeface="Calibri" pitchFamily="34" charset="-122"/>
-                <a:cs typeface="Calibri" pitchFamily="34" charset="-120"/>
-              </a:rPr>
-              <a:t>(릴레이·커넥터·브릿지)</a:t>
-            </a:r>
-            <a:endParaRPr lang="en-US" sz="1100" dirty="0"/>
-          </a:p>
-        </p:txBody>
-      </p:sp>
-      <p:sp>
-        <p:nvSpPr>
-          <p:cNvPr id="10" name="Shape 8"/>
+        </p:txBody>
+      </p:sp>
+      <p:sp>
+        <p:nvSpPr>
+          <p:cNvPr id="9" name="Shape 7"/>
           <p:cNvSpPr/>
           <p:nvPr/>
         </p:nvSpPr>
         <p:spPr>
           <a:xfrm>
-            <a:off x="6181344" y="1965960"/>
-            <a:ext cx="2514600" cy="1600200"/>
+            <a:off x="8503920" y="1691640"/>
+            <a:ext cx="3383280" cy="1600200"/>
           </a:xfrm>
           <a:prstGeom prst="roundRect">
             <a:avLst>
@@ -4368,14 +4346,53 @@
       </p:sp>
       <p:sp>
         <p:nvSpPr>
+          <p:cNvPr id="10" name="Text 8"/>
+          <p:cNvSpPr txBox="1"/>
+          <p:nvPr/>
+        </p:nvSpPr>
+        <p:spPr>
+          <a:xfrm>
+            <a:off x="8503920" y="1856232"/>
+            <a:ext cx="3383280" cy="685800"/>
+          </a:xfrm>
+          <a:prstGeom prst="rect">
+            <a:avLst/>
+          </a:prstGeom>
+          <a:noFill/>
+          <a:ln/>
+        </p:spPr>
+        <p:txBody>
+          <a:bodyPr wrap="square" lIns="0" tIns="0" rIns="0" bIns="0" rtlCol="0" anchor="ctr"/>
+          <a:lstStyle/>
+          <a:p>
+            <a:pPr algn="ctr" indent="0" marL="0">
+              <a:buNone/>
+            </a:pPr>
+            <a:r>
+              <a:rPr lang="en-US" sz="3400" b="1" dirty="0">
+                <a:solidFill>
+                  <a:srgbClr val="00C39A"/>
+                </a:solidFill>
+                <a:latin typeface="Calibri" pitchFamily="34" charset="0"/>
+                <a:ea typeface="Calibri" pitchFamily="34" charset="-122"/>
+                <a:cs typeface="Calibri" pitchFamily="34" charset="-120"/>
+              </a:rPr>
+              <a:t>4</a:t>
+            </a:r>
+            <a:endParaRPr lang="en-US" sz="3400" dirty="0"/>
+          </a:p>
+        </p:txBody>
+      </p:sp>
+      <p:sp>
+        <p:nvSpPr>
           <p:cNvPr id="11" name="Text 9"/>
           <p:cNvSpPr txBox="1"/>
           <p:nvPr/>
         </p:nvSpPr>
         <p:spPr>
           <a:xfrm>
-            <a:off x="6181344" y="2130552"/>
-            <a:ext cx="2514600" cy="685800"/>
+            <a:off x="8503920" y="2587752"/>
+            <a:ext cx="3383280" cy="594360"/>
           </a:xfrm>
           <a:prstGeom prst="rect">
             <a:avLst/>
@@ -4391,40 +4408,18 @@
               <a:buNone/>
             </a:pPr>
             <a:r>
-              <a:rPr lang="en-US" sz="3400" b="1" dirty="0">
-                <a:solidFill>
-                  <a:srgbClr val="00C39A"/>
-                </a:solidFill>
-                <a:latin typeface="Calibri" pitchFamily="34" charset="0"/>
-                <a:ea typeface="Calibri" pitchFamily="34" charset="-122"/>
-                <a:cs typeface="Calibri" pitchFamily="34" charset="-120"/>
-              </a:rPr>
-              <a:t>2</a:t>
-            </a:r>
-            <a:endParaRPr lang="en-US" sz="3400" dirty="0"/>
-          </a:p>
-        </p:txBody>
-      </p:sp>
-      <p:sp>
-        <p:nvSpPr>
-          <p:cNvPr id="12" name="Text 10"/>
-          <p:cNvSpPr txBox="1"/>
-          <p:nvPr/>
-        </p:nvSpPr>
-        <p:spPr>
-          <a:xfrm>
-            <a:off x="6181344" y="2862072"/>
-            <a:ext cx="2514600" cy="594360"/>
-          </a:xfrm>
-          <a:prstGeom prst="rect">
-            <a:avLst/>
-          </a:prstGeom>
-          <a:noFill/>
-          <a:ln/>
-        </p:spPr>
-        <p:txBody>
-          <a:bodyPr wrap="square" lIns="0" tIns="0" rIns="0" bIns="0" rtlCol="0" anchor="ctr"/>
-          <a:lstStyle/>
+              <a:rPr lang="en-US" sz="1100" dirty="0">
+                <a:solidFill>
+                  <a:srgbClr val="EAF1FB"/>
+                </a:solidFill>
+                <a:latin typeface="Calibri" pitchFamily="34" charset="0"/>
+                <a:ea typeface="Calibri" pitchFamily="34" charset="-122"/>
+                <a:cs typeface="Calibri" pitchFamily="34" charset="-120"/>
+              </a:rPr>
+              <a:t>다운로드 파일</a:t>
+            </a:r>
+            <a:endParaRPr lang="en-US" sz="1100" dirty="0"/>
+          </a:p>
           <a:p>
             <a:pPr algn="ctr" indent="0" marL="0">
               <a:buNone/>
@@ -4438,160 +4433,26 @@
                 <a:ea typeface="Calibri" pitchFamily="34" charset="-122"/>
                 <a:cs typeface="Calibri" pitchFamily="34" charset="-120"/>
               </a:rPr>
-              <a:t>지원 플랫폼</a:t>
+              <a:t>(앱 2종 × 2 OS)</a:t>
             </a:r>
             <a:endParaRPr lang="en-US" sz="1100" dirty="0"/>
           </a:p>
-          <a:p>
-            <a:pPr algn="ctr" indent="0" marL="0">
-              <a:buNone/>
-            </a:pPr>
-            <a:r>
-              <a:rPr lang="en-US" sz="1100" dirty="0">
-                <a:solidFill>
-                  <a:srgbClr val="EAF1FB"/>
-                </a:solidFill>
-                <a:latin typeface="Calibri" pitchFamily="34" charset="0"/>
-                <a:ea typeface="Calibri" pitchFamily="34" charset="-122"/>
-                <a:cs typeface="Calibri" pitchFamily="34" charset="-120"/>
-              </a:rPr>
-              <a:t>(Windows·macOS)</a:t>
-            </a:r>
-            <a:endParaRPr lang="en-US" sz="1100" dirty="0"/>
-          </a:p>
-        </p:txBody>
-      </p:sp>
-      <p:sp>
-        <p:nvSpPr>
-          <p:cNvPr id="13" name="Shape 11"/>
+        </p:txBody>
+      </p:sp>
+      <p:sp>
+        <p:nvSpPr>
+          <p:cNvPr id="12" name="Shape 10"/>
           <p:cNvSpPr/>
           <p:nvPr/>
         </p:nvSpPr>
         <p:spPr>
           <a:xfrm>
-            <a:off x="8951976" y="1965960"/>
-            <a:ext cx="2514600" cy="1600200"/>
+            <a:off x="640080" y="3703320"/>
+            <a:ext cx="10881360" cy="2423160"/>
           </a:xfrm>
           <a:prstGeom prst="roundRect">
             <a:avLst>
-              <a:gd name="adj" fmla="val 5714"/>
-            </a:avLst>
-          </a:prstGeom>
-          <a:solidFill>
-            <a:srgbClr val="132B57"/>
-          </a:solidFill>
-          <a:ln/>
-        </p:spPr>
-      </p:sp>
-      <p:sp>
-        <p:nvSpPr>
-          <p:cNvPr id="14" name="Text 12"/>
-          <p:cNvSpPr txBox="1"/>
-          <p:nvPr/>
-        </p:nvSpPr>
-        <p:spPr>
-          <a:xfrm>
-            <a:off x="8951976" y="2130552"/>
-            <a:ext cx="2514600" cy="685800"/>
-          </a:xfrm>
-          <a:prstGeom prst="rect">
-            <a:avLst/>
-          </a:prstGeom>
-          <a:noFill/>
-          <a:ln/>
-        </p:spPr>
-        <p:txBody>
-          <a:bodyPr wrap="square" lIns="0" tIns="0" rIns="0" bIns="0" rtlCol="0" anchor="ctr"/>
-          <a:lstStyle/>
-          <a:p>
-            <a:pPr algn="ctr" indent="0" marL="0">
-              <a:buNone/>
-            </a:pPr>
-            <a:r>
-              <a:rPr lang="en-US" sz="3400" b="1" dirty="0">
-                <a:solidFill>
-                  <a:srgbClr val="00C39A"/>
-                </a:solidFill>
-                <a:latin typeface="Calibri" pitchFamily="34" charset="0"/>
-                <a:ea typeface="Calibri" pitchFamily="34" charset="-122"/>
-                <a:cs typeface="Calibri" pitchFamily="34" charset="-120"/>
-              </a:rPr>
-              <a:t>4</a:t>
-            </a:r>
-            <a:endParaRPr lang="en-US" sz="3400" dirty="0"/>
-          </a:p>
-        </p:txBody>
-      </p:sp>
-      <p:sp>
-        <p:nvSpPr>
-          <p:cNvPr id="15" name="Text 13"/>
-          <p:cNvSpPr txBox="1"/>
-          <p:nvPr/>
-        </p:nvSpPr>
-        <p:spPr>
-          <a:xfrm>
-            <a:off x="8951976" y="2862072"/>
-            <a:ext cx="2514600" cy="594360"/>
-          </a:xfrm>
-          <a:prstGeom prst="rect">
-            <a:avLst/>
-          </a:prstGeom>
-          <a:noFill/>
-          <a:ln/>
-        </p:spPr>
-        <p:txBody>
-          <a:bodyPr wrap="square" lIns="0" tIns="0" rIns="0" bIns="0" rtlCol="0" anchor="ctr"/>
-          <a:lstStyle/>
-          <a:p>
-            <a:pPr algn="ctr" indent="0" marL="0">
-              <a:buNone/>
-            </a:pPr>
-            <a:r>
-              <a:rPr lang="en-US" sz="1100" dirty="0">
-                <a:solidFill>
-                  <a:srgbClr val="EAF1FB"/>
-                </a:solidFill>
-                <a:latin typeface="Calibri" pitchFamily="34" charset="0"/>
-                <a:ea typeface="Calibri" pitchFamily="34" charset="-122"/>
-                <a:cs typeface="Calibri" pitchFamily="34" charset="-120"/>
-              </a:rPr>
-              <a:t>다운로드 파일</a:t>
-            </a:r>
-            <a:endParaRPr lang="en-US" sz="1100" dirty="0"/>
-          </a:p>
-          <a:p>
-            <a:pPr algn="ctr" indent="0" marL="0">
-              <a:buNone/>
-            </a:pPr>
-            <a:r>
-              <a:rPr lang="en-US" sz="1100" dirty="0">
-                <a:solidFill>
-                  <a:srgbClr val="EAF1FB"/>
-                </a:solidFill>
-                <a:latin typeface="Calibri" pitchFamily="34" charset="0"/>
-                <a:ea typeface="Calibri" pitchFamily="34" charset="-122"/>
-                <a:cs typeface="Calibri" pitchFamily="34" charset="-120"/>
-              </a:rPr>
-              <a:t>(앱 2종 × 2 OS)</a:t>
-            </a:r>
-            <a:endParaRPr lang="en-US" sz="1100" dirty="0"/>
-          </a:p>
-        </p:txBody>
-      </p:sp>
-      <p:sp>
-        <p:nvSpPr>
-          <p:cNvPr id="16" name="Shape 14"/>
-          <p:cNvSpPr/>
-          <p:nvPr/>
-        </p:nvSpPr>
-        <p:spPr>
-          <a:xfrm>
-            <a:off x="640080" y="3977640"/>
-            <a:ext cx="10881360" cy="2148840"/>
-          </a:xfrm>
-          <a:prstGeom prst="roundRect">
-            <a:avLst>
-              <a:gd name="adj" fmla="val 4255"/>
+              <a:gd name="adj" fmla="val 3774"/>
             </a:avLst>
           </a:prstGeom>
           <a:solidFill>
@@ -4602,13 +4463,13 @@
       </p:sp>
       <p:sp>
         <p:nvSpPr>
-          <p:cNvPr id="17" name="Text 15"/>
-          <p:cNvSpPr txBox="1"/>
-          <p:nvPr/>
-        </p:nvSpPr>
-        <p:spPr>
-          <a:xfrm>
-            <a:off x="914400" y="4160520"/>
+          <p:cNvPr id="13" name="Text 11"/>
+          <p:cNvSpPr txBox="1"/>
+          <p:nvPr/>
+        </p:nvSpPr>
+        <p:spPr>
+          <a:xfrm>
+            <a:off x="914400" y="3931920"/>
             <a:ext cx="10332720" cy="365760"/>
           </a:xfrm>
           <a:prstGeom prst="rect">
@@ -4641,14 +4502,14 @@
       </p:sp>
       <p:sp>
         <p:nvSpPr>
-          <p:cNvPr id="18" name="Text 16"/>
-          <p:cNvSpPr txBox="1"/>
-          <p:nvPr/>
-        </p:nvSpPr>
-        <p:spPr>
-          <a:xfrm>
-            <a:off x="914400" y="4572000"/>
-            <a:ext cx="10332720" cy="1417320"/>
+          <p:cNvPr id="14" name="Text 12"/>
+          <p:cNvSpPr txBox="1"/>
+          <p:nvPr/>
+        </p:nvSpPr>
+        <p:spPr>
+          <a:xfrm>
+            <a:off x="914400" y="4389120"/>
+            <a:ext cx="10332720" cy="1600200"/>
           </a:xfrm>
           <a:prstGeom prst="rect">
             <a:avLst/>
@@ -4662,7 +4523,7 @@
           <a:p>
             <a:pPr marL="342900" indent="-342900">
               <a:spcAft>
-                <a:spcPts val="1000"/>
+                <a:spcPts val="1200"/>
               </a:spcAft>
               <a:buSzPct val="100000"/>
               <a:buChar char="–"/>
@@ -4683,7 +4544,7 @@
           <a:p>
             <a:pPr marL="342900" indent="-342900">
               <a:spcAft>
-                <a:spcPts val="1000"/>
+                <a:spcPts val="1200"/>
               </a:spcAft>
               <a:buSzPct val="100000"/>
               <a:buChar char="–"/>
@@ -4704,7 +4565,7 @@
           <a:p>
             <a:pPr marL="342900" indent="-342900">
               <a:spcAft>
-                <a:spcPts val="1000"/>
+                <a:spcPts val="1200"/>
               </a:spcAft>
               <a:buSzPct val="100000"/>
               <a:buChar char="–"/>
